--- a/material/5_AI/11_분류.pptx
+++ b/material/5_AI/11_분류.pptx
@@ -8,7 +8,7 @@
     <p:notesMasterId r:id="rId38"/>
   </p:notesMasterIdLst>
   <p:sldIdLst>
-    <p:sldId id="1004" r:id="rId2"/>
+    <p:sldId id="1013" r:id="rId2"/>
     <p:sldId id="724" r:id="rId3"/>
     <p:sldId id="720" r:id="rId4"/>
     <p:sldId id="1022" r:id="rId5"/>
@@ -253,7 +253,7 @@
             <a:fld id="{A13A867C-D490-40C2-AB8D-A60FA70A9BF5}" type="datetimeFigureOut">
               <a:rPr lang="ko-KR" altLang="en-US" smtClean="0"/>
               <a:pPr/>
-              <a:t>2025-09-19</a:t>
+              <a:t>2026-02-10</a:t>
             </a:fld>
             <a:endParaRPr lang="ko-KR" altLang="en-US" dirty="0"/>
           </a:p>
@@ -991,7 +991,7 @@
           <a:p>
             <a:fld id="{442BEE3F-2E9A-4FD8-8B8A-8619F3E161C0}" type="datetime1">
               <a:rPr lang="ko-KR" altLang="en-US" smtClean="0"/>
-              <a:t>2025-09-19</a:t>
+              <a:t>2026-02-10</a:t>
             </a:fld>
             <a:endParaRPr lang="ko-KR" altLang="en-US"/>
           </a:p>
@@ -1278,7 +1278,7 @@
           <a:p>
             <a:fld id="{0F78D9C4-20C1-4B15-A116-16DC77AD9A1E}" type="datetime1">
               <a:rPr lang="ko-KR" altLang="en-US" smtClean="0"/>
-              <a:t>2025-09-19</a:t>
+              <a:t>2026-02-10</a:t>
             </a:fld>
             <a:endParaRPr lang="ko-KR" altLang="en-US"/>
           </a:p>
@@ -1453,7 +1453,7 @@
           <a:p>
             <a:fld id="{7F5E23C3-0E3D-4E4E-8486-D7FB4C073DC1}" type="datetime1">
               <a:rPr lang="ko-KR" altLang="en-US" smtClean="0"/>
-              <a:t>2025-09-19</a:t>
+              <a:t>2026-02-10</a:t>
             </a:fld>
             <a:endParaRPr lang="ko-KR" altLang="en-US"/>
           </a:p>
@@ -1782,7 +1782,7 @@
           <a:p>
             <a:fld id="{7F5E23C3-0E3D-4E4E-8486-D7FB4C073DC1}" type="datetime1">
               <a:rPr lang="ko-KR" altLang="en-US" smtClean="0"/>
-              <a:t>2025-09-19</a:t>
+              <a:t>2026-02-10</a:t>
             </a:fld>
             <a:endParaRPr lang="ko-KR" altLang="en-US"/>
           </a:p>
@@ -2304,105 +2304,6 @@
           </a:p>
         </p:txBody>
       </p:sp>
-      <p:sp>
-        <p:nvSpPr>
-          <p:cNvPr id="3" name="부제목 2">
-            <a:extLst>
-              <a:ext uri="{FF2B5EF4-FFF2-40B4-BE49-F238E27FC236}">
-                <a16:creationId xmlns:a16="http://schemas.microsoft.com/office/drawing/2014/main" id="{5F9E2036-8D3D-3C48-304C-6615D19E477C}"/>
-              </a:ext>
-            </a:extLst>
-          </p:cNvPr>
-          <p:cNvSpPr>
-            <a:spLocks noGrp="1"/>
-          </p:cNvSpPr>
-          <p:nvPr>
-            <p:ph type="subTitle" idx="1"/>
-          </p:nvPr>
-        </p:nvSpPr>
-        <p:spPr>
-          <a:xfrm>
-            <a:off x="6375349" y="3686684"/>
-            <a:ext cx="2336503" cy="530087"/>
-          </a:xfrm>
-        </p:spPr>
-        <p:txBody>
-          <a:bodyPr wrap="square"/>
-          <a:lstStyle/>
-          <a:p>
-            <a:pPr algn="just"/>
-            <a:r>
-              <a:rPr lang="ko-KR" altLang="en-US" b="1" dirty="0">
-                <a:solidFill>
-                  <a:srgbClr val="2B2B2B"/>
-                </a:solidFill>
-                <a:latin typeface="G마켓 산스 TTF Bold" panose="02000000000000000000" pitchFamily="2" charset="-127"/>
-                <a:ea typeface="G마켓 산스 TTF Bold" panose="02000000000000000000" pitchFamily="2" charset="-127"/>
-                <a:cs typeface="Pretendard SemiBold" panose="02000703000000020004" pitchFamily="2" charset="-127"/>
-              </a:rPr>
-              <a:t>재생에너지 </a:t>
-            </a:r>
-            <a:r>
-              <a:rPr lang="en-US" altLang="ko-KR" b="1" dirty="0">
-                <a:solidFill>
-                  <a:srgbClr val="2B2B2B"/>
-                </a:solidFill>
-                <a:latin typeface="G마켓 산스 TTF Bold" panose="02000000000000000000" pitchFamily="2" charset="-127"/>
-                <a:ea typeface="G마켓 산스 TTF Bold" panose="02000000000000000000" pitchFamily="2" charset="-127"/>
-                <a:cs typeface="Pretendard SemiBold" panose="02000703000000020004" pitchFamily="2" charset="-127"/>
-              </a:rPr>
-              <a:t>3</a:t>
-            </a:r>
-            <a:r>
-              <a:rPr lang="ko-KR" altLang="en-US" b="1" dirty="0">
-                <a:solidFill>
-                  <a:srgbClr val="2B2B2B"/>
-                </a:solidFill>
-                <a:latin typeface="G마켓 산스 TTF Bold" panose="02000000000000000000" pitchFamily="2" charset="-127"/>
-                <a:ea typeface="G마켓 산스 TTF Bold" panose="02000000000000000000" pitchFamily="2" charset="-127"/>
-                <a:cs typeface="Pretendard SemiBold" panose="02000703000000020004" pitchFamily="2" charset="-127"/>
-              </a:rPr>
-              <a:t>기</a:t>
-            </a:r>
-          </a:p>
-        </p:txBody>
-      </p:sp>
-      <p:pic>
-        <p:nvPicPr>
-          <p:cNvPr id="4" name="그림 3">
-            <a:extLst>
-              <a:ext uri="{FF2B5EF4-FFF2-40B4-BE49-F238E27FC236}">
-                <a16:creationId xmlns:a16="http://schemas.microsoft.com/office/drawing/2014/main" id="{73AD1B1D-CD7D-EE4E-41B0-87A1CCAAD46F}"/>
-              </a:ext>
-            </a:extLst>
-          </p:cNvPr>
-          <p:cNvPicPr>
-            <a:picLocks noChangeAspect="1"/>
-          </p:cNvPicPr>
-          <p:nvPr/>
-        </p:nvPicPr>
-        <p:blipFill>
-          <a:blip r:embed="rId3">
-            <a:extLst>
-              <a:ext uri="{28A0092B-C50C-407E-A947-70E740481C1C}">
-                <a14:useLocalDpi xmlns:a14="http://schemas.microsoft.com/office/drawing/2010/main" val="0"/>
-              </a:ext>
-            </a:extLst>
-          </a:blip>
-          <a:stretch>
-            <a:fillRect/>
-          </a:stretch>
-        </p:blipFill>
-        <p:spPr>
-          <a:xfrm>
-            <a:off x="3229511" y="3670957"/>
-            <a:ext cx="3021223" cy="456225"/>
-          </a:xfrm>
-          <a:prstGeom prst="rect">
-            <a:avLst/>
-          </a:prstGeom>
-        </p:spPr>
-      </p:pic>
       <p:grpSp>
         <p:nvGrpSpPr>
           <p:cNvPr id="5" name="그룹 4">
@@ -2438,7 +2339,7 @@
             <p:nvPr/>
           </p:nvPicPr>
           <p:blipFill>
-            <a:blip r:embed="rId4">
+            <a:blip r:embed="rId3">
               <a:extLst>
                 <a:ext uri="{28A0092B-C50C-407E-A947-70E740481C1C}">
                   <a14:useLocalDpi xmlns:a14="http://schemas.microsoft.com/office/drawing/2010/main" val="0"/>
@@ -2474,7 +2375,7 @@
             <p:nvPr/>
           </p:nvPicPr>
           <p:blipFill>
-            <a:blip r:embed="rId5" cstate="print">
+            <a:blip r:embed="rId4" cstate="print">
               <a:extLst>
                 <a:ext uri="{28A0092B-C50C-407E-A947-70E740481C1C}">
                   <a14:useLocalDpi xmlns:a14="http://schemas.microsoft.com/office/drawing/2010/main" val="0"/>
@@ -2496,10 +2397,275 @@
           </p:spPr>
         </p:pic>
       </p:grpSp>
+      <p:sp>
+        <p:nvSpPr>
+          <p:cNvPr id="8" name="부제목 2">
+            <a:extLst>
+              <a:ext uri="{FF2B5EF4-FFF2-40B4-BE49-F238E27FC236}">
+                <a16:creationId xmlns:a16="http://schemas.microsoft.com/office/drawing/2014/main" id="{DB4B2667-B3F4-F4E7-4A87-A3477312E2B1}"/>
+              </a:ext>
+            </a:extLst>
+          </p:cNvPr>
+          <p:cNvSpPr txBox="1">
+            <a:spLocks/>
+          </p:cNvSpPr>
+          <p:nvPr/>
+        </p:nvSpPr>
+        <p:spPr>
+          <a:xfrm>
+            <a:off x="5194406" y="3686684"/>
+            <a:ext cx="4316585" cy="530087"/>
+          </a:xfrm>
+          <a:prstGeom prst="rect">
+            <a:avLst/>
+          </a:prstGeom>
+        </p:spPr>
+        <p:txBody>
+          <a:bodyPr vert="horz" wrap="square" lIns="91440" tIns="45720" rIns="91440" bIns="45720" rtlCol="0">
+            <a:normAutofit fontScale="85000" lnSpcReduction="10000"/>
+          </a:bodyPr>
+          <a:lstStyle>
+            <a:lvl1pPr marL="0" indent="0" algn="ctr" defTabSz="914400" rtl="0" eaLnBrk="1" latinLnBrk="1" hangingPunct="1">
+              <a:lnSpc>
+                <a:spcPct val="90000"/>
+              </a:lnSpc>
+              <a:spcBef>
+                <a:spcPts val="1000"/>
+              </a:spcBef>
+              <a:buFont typeface="Arial" panose="020B0604020202020204" pitchFamily="34" charset="0"/>
+              <a:buNone/>
+              <a:defRPr sz="2400" kern="1200">
+                <a:solidFill>
+                  <a:schemeClr val="tx1"/>
+                </a:solidFill>
+                <a:latin typeface="Pretendard Medium" panose="02000603000000020004" pitchFamily="2" charset="-127"/>
+                <a:ea typeface="Pretendard Medium" panose="02000603000000020004" pitchFamily="2" charset="-127"/>
+                <a:cs typeface="Pretendard Medium" panose="02000603000000020004" pitchFamily="2" charset="-127"/>
+              </a:defRPr>
+            </a:lvl1pPr>
+            <a:lvl2pPr marL="457200" indent="0" algn="ctr" defTabSz="914400" rtl="0" eaLnBrk="1" latinLnBrk="1" hangingPunct="1">
+              <a:lnSpc>
+                <a:spcPct val="90000"/>
+              </a:lnSpc>
+              <a:spcBef>
+                <a:spcPts val="500"/>
+              </a:spcBef>
+              <a:buFont typeface="Arial" panose="020B0604020202020204" pitchFamily="34" charset="0"/>
+              <a:buNone/>
+              <a:defRPr sz="2000" kern="1200">
+                <a:solidFill>
+                  <a:schemeClr val="tx1"/>
+                </a:solidFill>
+                <a:latin typeface="Pretendard Light" panose="02000403000000020004" pitchFamily="2" charset="-127"/>
+                <a:ea typeface="Pretendard Light" panose="02000403000000020004" pitchFamily="2" charset="-127"/>
+                <a:cs typeface="Pretendard Light" panose="02000403000000020004" pitchFamily="2" charset="-127"/>
+              </a:defRPr>
+            </a:lvl2pPr>
+            <a:lvl3pPr marL="914400" indent="0" algn="ctr" defTabSz="914400" rtl="0" eaLnBrk="1" latinLnBrk="1" hangingPunct="1">
+              <a:lnSpc>
+                <a:spcPct val="90000"/>
+              </a:lnSpc>
+              <a:spcBef>
+                <a:spcPts val="500"/>
+              </a:spcBef>
+              <a:buFont typeface="Arial" panose="020B0604020202020204" pitchFamily="34" charset="0"/>
+              <a:buNone/>
+              <a:defRPr sz="1800" kern="1200">
+                <a:solidFill>
+                  <a:schemeClr val="tx1"/>
+                </a:solidFill>
+                <a:latin typeface="Pretendard Light" panose="02000403000000020004" pitchFamily="2" charset="-127"/>
+                <a:ea typeface="Pretendard Light" panose="02000403000000020004" pitchFamily="2" charset="-127"/>
+                <a:cs typeface="Pretendard Light" panose="02000403000000020004" pitchFamily="2" charset="-127"/>
+              </a:defRPr>
+            </a:lvl3pPr>
+            <a:lvl4pPr marL="1371600" indent="0" algn="ctr" defTabSz="914400" rtl="0" eaLnBrk="1" latinLnBrk="1" hangingPunct="1">
+              <a:lnSpc>
+                <a:spcPct val="90000"/>
+              </a:lnSpc>
+              <a:spcBef>
+                <a:spcPts val="500"/>
+              </a:spcBef>
+              <a:buFont typeface="Arial" panose="020B0604020202020204" pitchFamily="34" charset="0"/>
+              <a:buNone/>
+              <a:defRPr sz="1600" kern="1200">
+                <a:solidFill>
+                  <a:schemeClr val="tx1"/>
+                </a:solidFill>
+                <a:latin typeface="Pretendard Light" panose="02000403000000020004" pitchFamily="2" charset="-127"/>
+                <a:ea typeface="Pretendard Light" panose="02000403000000020004" pitchFamily="2" charset="-127"/>
+                <a:cs typeface="Pretendard Light" panose="02000403000000020004" pitchFamily="2" charset="-127"/>
+              </a:defRPr>
+            </a:lvl4pPr>
+            <a:lvl5pPr marL="1828800" indent="0" algn="ctr" defTabSz="914400" rtl="0" eaLnBrk="1" latinLnBrk="1" hangingPunct="1">
+              <a:lnSpc>
+                <a:spcPct val="90000"/>
+              </a:lnSpc>
+              <a:spcBef>
+                <a:spcPts val="500"/>
+              </a:spcBef>
+              <a:buFont typeface="Arial" panose="020B0604020202020204" pitchFamily="34" charset="0"/>
+              <a:buNone/>
+              <a:defRPr sz="1600" kern="1200">
+                <a:solidFill>
+                  <a:schemeClr val="tx1"/>
+                </a:solidFill>
+                <a:latin typeface="Pretendard Light" panose="02000403000000020004" pitchFamily="2" charset="-127"/>
+                <a:ea typeface="Pretendard Light" panose="02000403000000020004" pitchFamily="2" charset="-127"/>
+                <a:cs typeface="Pretendard Light" panose="02000403000000020004" pitchFamily="2" charset="-127"/>
+              </a:defRPr>
+            </a:lvl5pPr>
+            <a:lvl6pPr marL="2286000" indent="0" algn="ctr" defTabSz="914400" rtl="0" eaLnBrk="1" latinLnBrk="1" hangingPunct="1">
+              <a:lnSpc>
+                <a:spcPct val="90000"/>
+              </a:lnSpc>
+              <a:spcBef>
+                <a:spcPts val="500"/>
+              </a:spcBef>
+              <a:buFont typeface="Arial" panose="020B0604020202020204" pitchFamily="34" charset="0"/>
+              <a:buNone/>
+              <a:defRPr sz="1600" kern="1200">
+                <a:solidFill>
+                  <a:schemeClr val="tx1"/>
+                </a:solidFill>
+                <a:latin typeface="+mn-lt"/>
+                <a:ea typeface="+mn-ea"/>
+                <a:cs typeface="+mn-cs"/>
+              </a:defRPr>
+            </a:lvl6pPr>
+            <a:lvl7pPr marL="2743200" indent="0" algn="ctr" defTabSz="914400" rtl="0" eaLnBrk="1" latinLnBrk="1" hangingPunct="1">
+              <a:lnSpc>
+                <a:spcPct val="90000"/>
+              </a:lnSpc>
+              <a:spcBef>
+                <a:spcPts val="500"/>
+              </a:spcBef>
+              <a:buFont typeface="Arial" panose="020B0604020202020204" pitchFamily="34" charset="0"/>
+              <a:buNone/>
+              <a:defRPr sz="1600" kern="1200">
+                <a:solidFill>
+                  <a:schemeClr val="tx1"/>
+                </a:solidFill>
+                <a:latin typeface="+mn-lt"/>
+                <a:ea typeface="+mn-ea"/>
+                <a:cs typeface="+mn-cs"/>
+              </a:defRPr>
+            </a:lvl7pPr>
+            <a:lvl8pPr marL="3200400" indent="0" algn="ctr" defTabSz="914400" rtl="0" eaLnBrk="1" latinLnBrk="1" hangingPunct="1">
+              <a:lnSpc>
+                <a:spcPct val="90000"/>
+              </a:lnSpc>
+              <a:spcBef>
+                <a:spcPts val="500"/>
+              </a:spcBef>
+              <a:buFont typeface="Arial" panose="020B0604020202020204" pitchFamily="34" charset="0"/>
+              <a:buNone/>
+              <a:defRPr sz="1600" kern="1200">
+                <a:solidFill>
+                  <a:schemeClr val="tx1"/>
+                </a:solidFill>
+                <a:latin typeface="+mn-lt"/>
+                <a:ea typeface="+mn-ea"/>
+                <a:cs typeface="+mn-cs"/>
+              </a:defRPr>
+            </a:lvl8pPr>
+            <a:lvl9pPr marL="3657600" indent="0" algn="ctr" defTabSz="914400" rtl="0" eaLnBrk="1" latinLnBrk="1" hangingPunct="1">
+              <a:lnSpc>
+                <a:spcPct val="90000"/>
+              </a:lnSpc>
+              <a:spcBef>
+                <a:spcPts val="500"/>
+              </a:spcBef>
+              <a:buFont typeface="Arial" panose="020B0604020202020204" pitchFamily="34" charset="0"/>
+              <a:buNone/>
+              <a:defRPr sz="1600" kern="1200">
+                <a:solidFill>
+                  <a:schemeClr val="tx1"/>
+                </a:solidFill>
+                <a:latin typeface="+mn-lt"/>
+                <a:ea typeface="+mn-ea"/>
+                <a:cs typeface="+mn-cs"/>
+              </a:defRPr>
+            </a:lvl9pPr>
+          </a:lstStyle>
+          <a:p>
+            <a:pPr algn="just"/>
+            <a:r>
+              <a:rPr lang="ko-KR" altLang="en-US" b="1" dirty="0">
+                <a:solidFill>
+                  <a:srgbClr val="2B2B2B"/>
+                </a:solidFill>
+                <a:latin typeface="G마켓 산스 TTF Bold" panose="02000000000000000000" pitchFamily="2" charset="-127"/>
+                <a:ea typeface="G마켓 산스 TTF Bold" panose="02000000000000000000" pitchFamily="2" charset="-127"/>
+                <a:cs typeface="Pretendard SemiBold" panose="02000703000000020004" pitchFamily="2" charset="-127"/>
+              </a:rPr>
+              <a:t>신재생에너지 </a:t>
+            </a:r>
+            <a:r>
+              <a:rPr lang="en-US" altLang="ko-KR" b="1" dirty="0">
+                <a:solidFill>
+                  <a:srgbClr val="2B2B2B"/>
+                </a:solidFill>
+                <a:latin typeface="G마켓 산스 TTF Bold" panose="02000000000000000000" pitchFamily="2" charset="-127"/>
+                <a:ea typeface="G마켓 산스 TTF Bold" panose="02000000000000000000" pitchFamily="2" charset="-127"/>
+                <a:cs typeface="Pretendard SemiBold" panose="02000703000000020004" pitchFamily="2" charset="-127"/>
+              </a:rPr>
+              <a:t>IoT </a:t>
+            </a:r>
+            <a:r>
+              <a:rPr lang="ko-KR" altLang="en-US" b="1" dirty="0">
+                <a:solidFill>
+                  <a:srgbClr val="2B2B2B"/>
+                </a:solidFill>
+                <a:latin typeface="G마켓 산스 TTF Bold" panose="02000000000000000000" pitchFamily="2" charset="-127"/>
+                <a:ea typeface="G마켓 산스 TTF Bold" panose="02000000000000000000" pitchFamily="2" charset="-127"/>
+                <a:cs typeface="Pretendard SemiBold" panose="02000703000000020004" pitchFamily="2" charset="-127"/>
+              </a:rPr>
+              <a:t>개발자 입문 과정</a:t>
+            </a:r>
+          </a:p>
+        </p:txBody>
+      </p:sp>
+      <p:pic>
+        <p:nvPicPr>
+          <p:cNvPr id="11" name="그림 10">
+            <a:extLst>
+              <a:ext uri="{FF2B5EF4-FFF2-40B4-BE49-F238E27FC236}">
+                <a16:creationId xmlns:a16="http://schemas.microsoft.com/office/drawing/2014/main" id="{43B0D367-DE04-26A9-6CB6-502ED4BB2FD3}"/>
+              </a:ext>
+            </a:extLst>
+          </p:cNvPr>
+          <p:cNvPicPr>
+            <a:picLocks noChangeAspect="1"/>
+          </p:cNvPicPr>
+          <p:nvPr/>
+        </p:nvPicPr>
+        <p:blipFill>
+          <a:blip r:embed="rId5">
+            <a:extLst>
+              <a:ext uri="{28A0092B-C50C-407E-A947-70E740481C1C}">
+                <a14:useLocalDpi xmlns:a14="http://schemas.microsoft.com/office/drawing/2010/main" val="0"/>
+              </a:ext>
+            </a:extLst>
+          </a:blip>
+          <a:stretch>
+            <a:fillRect/>
+          </a:stretch>
+        </p:blipFill>
+        <p:spPr>
+          <a:xfrm>
+            <a:off x="2829943" y="3670957"/>
+            <a:ext cx="2303166" cy="347793"/>
+          </a:xfrm>
+          <a:prstGeom prst="rect">
+            <a:avLst/>
+          </a:prstGeom>
+        </p:spPr>
+      </p:pic>
     </p:spTree>
     <p:extLst>
       <p:ext uri="{BB962C8B-B14F-4D97-AF65-F5344CB8AC3E}">
-        <p14:creationId xmlns:p14="http://schemas.microsoft.com/office/powerpoint/2010/main" val="1195912630"/>
+        <p14:creationId xmlns:p14="http://schemas.microsoft.com/office/powerpoint/2010/main" val="747806235"/>
       </p:ext>
     </p:extLst>
   </p:cSld>
@@ -2549,7 +2715,7 @@
           <a:p>
             <a:fld id="{0F78D9C4-20C1-4B15-A116-16DC77AD9A1E}" type="datetime1">
               <a:rPr lang="ko-KR" altLang="en-US" smtClean="0"/>
-              <a:t>2025-09-19</a:t>
+              <a:t>2026-02-10</a:t>
             </a:fld>
             <a:endParaRPr lang="ko-KR" altLang="en-US"/>
           </a:p>
@@ -2829,7 +2995,7 @@
           <a:p>
             <a:fld id="{0F78D9C4-20C1-4B15-A116-16DC77AD9A1E}" type="datetime1">
               <a:rPr lang="ko-KR" altLang="en-US" smtClean="0"/>
-              <a:t>2025-09-19</a:t>
+              <a:t>2026-02-10</a:t>
             </a:fld>
             <a:endParaRPr lang="ko-KR" altLang="en-US"/>
           </a:p>
@@ -3119,7 +3285,7 @@
           <a:p>
             <a:fld id="{0F78D9C4-20C1-4B15-A116-16DC77AD9A1E}" type="datetime1">
               <a:rPr lang="ko-KR" altLang="en-US" smtClean="0"/>
-              <a:t>2025-09-19</a:t>
+              <a:t>2026-02-10</a:t>
             </a:fld>
             <a:endParaRPr lang="ko-KR" altLang="en-US"/>
           </a:p>
@@ -3500,7 +3666,7 @@
           <a:p>
             <a:fld id="{0F78D9C4-20C1-4B15-A116-16DC77AD9A1E}" type="datetime1">
               <a:rPr lang="ko-KR" altLang="en-US" smtClean="0"/>
-              <a:t>2025-09-19</a:t>
+              <a:t>2026-02-10</a:t>
             </a:fld>
             <a:endParaRPr lang="ko-KR" altLang="en-US"/>
           </a:p>
@@ -3980,7 +4146,7 @@
           <a:p>
             <a:fld id="{0F78D9C4-20C1-4B15-A116-16DC77AD9A1E}" type="datetime1">
               <a:rPr lang="ko-KR" altLang="en-US" smtClean="0"/>
-              <a:t>2025-09-19</a:t>
+              <a:t>2026-02-10</a:t>
             </a:fld>
             <a:endParaRPr lang="ko-KR" altLang="en-US"/>
           </a:p>
@@ -4372,7 +4538,7 @@
           <a:p>
             <a:fld id="{0F78D9C4-20C1-4B15-A116-16DC77AD9A1E}" type="datetime1">
               <a:rPr lang="ko-KR" altLang="en-US" smtClean="0"/>
-              <a:t>2025-09-19</a:t>
+              <a:t>2026-02-10</a:t>
             </a:fld>
             <a:endParaRPr lang="ko-KR" altLang="en-US"/>
           </a:p>
@@ -4761,7 +4927,7 @@
           <a:p>
             <a:fld id="{0F78D9C4-20C1-4B15-A116-16DC77AD9A1E}" type="datetime1">
               <a:rPr lang="ko-KR" altLang="en-US" smtClean="0"/>
-              <a:t>2025-09-19</a:t>
+              <a:t>2026-02-10</a:t>
             </a:fld>
             <a:endParaRPr lang="ko-KR" altLang="en-US"/>
           </a:p>
@@ -5121,7 +5287,7 @@
           <a:p>
             <a:fld id="{0F78D9C4-20C1-4B15-A116-16DC77AD9A1E}" type="datetime1">
               <a:rPr lang="ko-KR" altLang="en-US" smtClean="0"/>
-              <a:t>2025-09-19</a:t>
+              <a:t>2026-02-10</a:t>
             </a:fld>
             <a:endParaRPr lang="ko-KR" altLang="en-US"/>
           </a:p>
@@ -5695,7 +5861,7 @@
           <a:p>
             <a:fld id="{0F78D9C4-20C1-4B15-A116-16DC77AD9A1E}" type="datetime1">
               <a:rPr lang="ko-KR" altLang="en-US" smtClean="0"/>
-              <a:t>2025-09-19</a:t>
+              <a:t>2026-02-10</a:t>
             </a:fld>
             <a:endParaRPr lang="ko-KR" altLang="en-US"/>
           </a:p>
@@ -5789,7 +5955,7 @@
           <a:p>
             <a:fld id="{0F78D9C4-20C1-4B15-A116-16DC77AD9A1E}" type="datetime1">
               <a:rPr lang="ko-KR" altLang="en-US" smtClean="0"/>
-              <a:t>2025-09-19</a:t>
+              <a:t>2026-02-10</a:t>
             </a:fld>
             <a:endParaRPr lang="ko-KR" altLang="en-US"/>
           </a:p>
@@ -5919,7 +6085,7 @@
           <a:p>
             <a:fld id="{0F78D9C4-20C1-4B15-A116-16DC77AD9A1E}" type="datetime1">
               <a:rPr lang="ko-KR" altLang="en-US" smtClean="0"/>
-              <a:t>2025-09-19</a:t>
+              <a:t>2026-02-10</a:t>
             </a:fld>
             <a:endParaRPr lang="ko-KR" altLang="en-US"/>
           </a:p>
@@ -6357,7 +6523,7 @@
           <a:p>
             <a:fld id="{0F78D9C4-20C1-4B15-A116-16DC77AD9A1E}" type="datetime1">
               <a:rPr lang="ko-KR" altLang="en-US" smtClean="0"/>
-              <a:t>2025-09-19</a:t>
+              <a:t>2026-02-10</a:t>
             </a:fld>
             <a:endParaRPr lang="ko-KR" altLang="en-US"/>
           </a:p>
@@ -6544,7 +6710,7 @@
           <a:p>
             <a:fld id="{0F78D9C4-20C1-4B15-A116-16DC77AD9A1E}" type="datetime1">
               <a:rPr lang="ko-KR" altLang="en-US" smtClean="0"/>
-              <a:t>2025-09-19</a:t>
+              <a:t>2026-02-10</a:t>
             </a:fld>
             <a:endParaRPr lang="ko-KR" altLang="en-US"/>
           </a:p>
@@ -6891,7 +7057,7 @@
           <a:p>
             <a:fld id="{0F78D9C4-20C1-4B15-A116-16DC77AD9A1E}" type="datetime1">
               <a:rPr lang="ko-KR" altLang="en-US" smtClean="0"/>
-              <a:t>2025-09-19</a:t>
+              <a:t>2026-02-10</a:t>
             </a:fld>
             <a:endParaRPr lang="ko-KR" altLang="en-US"/>
           </a:p>
@@ -7327,7 +7493,7 @@
           <a:p>
             <a:fld id="{0F78D9C4-20C1-4B15-A116-16DC77AD9A1E}" type="datetime1">
               <a:rPr lang="ko-KR" altLang="en-US" smtClean="0"/>
-              <a:t>2025-09-19</a:t>
+              <a:t>2026-02-10</a:t>
             </a:fld>
             <a:endParaRPr lang="ko-KR" altLang="en-US"/>
           </a:p>
@@ -7685,7 +7851,7 @@
           <a:p>
             <a:fld id="{0F78D9C4-20C1-4B15-A116-16DC77AD9A1E}" type="datetime1">
               <a:rPr lang="ko-KR" altLang="en-US" smtClean="0"/>
-              <a:t>2025-09-19</a:t>
+              <a:t>2026-02-10</a:t>
             </a:fld>
             <a:endParaRPr lang="ko-KR" altLang="en-US"/>
           </a:p>
@@ -7989,7 +8155,7 @@
           <a:p>
             <a:fld id="{0F78D9C4-20C1-4B15-A116-16DC77AD9A1E}" type="datetime1">
               <a:rPr lang="ko-KR" altLang="en-US" smtClean="0"/>
-              <a:t>2025-09-19</a:t>
+              <a:t>2026-02-10</a:t>
             </a:fld>
             <a:endParaRPr lang="ko-KR" altLang="en-US"/>
           </a:p>
@@ -8480,7 +8646,7 @@
           <a:p>
             <a:fld id="{0F78D9C4-20C1-4B15-A116-16DC77AD9A1E}" type="datetime1">
               <a:rPr lang="ko-KR" altLang="en-US" smtClean="0"/>
-              <a:t>2025-09-19</a:t>
+              <a:t>2026-02-10</a:t>
             </a:fld>
             <a:endParaRPr lang="ko-KR" altLang="en-US"/>
           </a:p>
@@ -9149,7 +9315,7 @@
           <a:p>
             <a:fld id="{0F78D9C4-20C1-4B15-A116-16DC77AD9A1E}" type="datetime1">
               <a:rPr lang="ko-KR" altLang="en-US" smtClean="0"/>
-              <a:t>2025-09-19</a:t>
+              <a:t>2026-02-10</a:t>
             </a:fld>
             <a:endParaRPr lang="ko-KR" altLang="en-US"/>
           </a:p>
@@ -9369,7 +9535,7 @@
           <a:p>
             <a:fld id="{0F78D9C4-20C1-4B15-A116-16DC77AD9A1E}" type="datetime1">
               <a:rPr lang="ko-KR" altLang="en-US" smtClean="0"/>
-              <a:t>2025-09-19</a:t>
+              <a:t>2026-02-10</a:t>
             </a:fld>
             <a:endParaRPr lang="ko-KR" altLang="en-US"/>
           </a:p>
@@ -9785,7 +9951,7 @@
           <a:p>
             <a:fld id="{0F78D9C4-20C1-4B15-A116-16DC77AD9A1E}" type="datetime1">
               <a:rPr lang="ko-KR" altLang="en-US" smtClean="0"/>
-              <a:t>2025-09-19</a:t>
+              <a:t>2026-02-10</a:t>
             </a:fld>
             <a:endParaRPr lang="ko-KR" altLang="en-US"/>
           </a:p>
@@ -10073,7 +10239,7 @@
           <a:p>
             <a:fld id="{0F78D9C4-20C1-4B15-A116-16DC77AD9A1E}" type="datetime1">
               <a:rPr lang="ko-KR" altLang="en-US" smtClean="0"/>
-              <a:t>2025-09-19</a:t>
+              <a:t>2026-02-10</a:t>
             </a:fld>
             <a:endParaRPr lang="ko-KR" altLang="en-US"/>
           </a:p>
@@ -10470,7 +10636,7 @@
           <a:p>
             <a:fld id="{0F78D9C4-20C1-4B15-A116-16DC77AD9A1E}" type="datetime1">
               <a:rPr lang="ko-KR" altLang="en-US" smtClean="0"/>
-              <a:t>2025-09-19</a:t>
+              <a:t>2026-02-10</a:t>
             </a:fld>
             <a:endParaRPr lang="ko-KR" altLang="en-US"/>
           </a:p>
@@ -10959,7 +11125,7 @@
           <a:p>
             <a:fld id="{0F78D9C4-20C1-4B15-A116-16DC77AD9A1E}" type="datetime1">
               <a:rPr lang="ko-KR" altLang="en-US" smtClean="0"/>
-              <a:t>2025-09-19</a:t>
+              <a:t>2026-02-10</a:t>
             </a:fld>
             <a:endParaRPr lang="ko-KR" altLang="en-US"/>
           </a:p>
@@ -11360,7 +11526,7 @@
           <a:p>
             <a:fld id="{0F78D9C4-20C1-4B15-A116-16DC77AD9A1E}" type="datetime1">
               <a:rPr lang="ko-KR" altLang="en-US" smtClean="0"/>
-              <a:t>2025-09-19</a:t>
+              <a:t>2026-02-10</a:t>
             </a:fld>
             <a:endParaRPr lang="ko-KR" altLang="en-US"/>
           </a:p>
@@ -11770,7 +11936,7 @@
           <a:p>
             <a:fld id="{0F78D9C4-20C1-4B15-A116-16DC77AD9A1E}" type="datetime1">
               <a:rPr lang="ko-KR" altLang="en-US" smtClean="0"/>
-              <a:t>2025-09-19</a:t>
+              <a:t>2026-02-10</a:t>
             </a:fld>
             <a:endParaRPr lang="ko-KR" altLang="en-US"/>
           </a:p>
@@ -11912,7 +12078,7 @@
           <a:p>
             <a:fld id="{0F78D9C4-20C1-4B15-A116-16DC77AD9A1E}" type="datetime1">
               <a:rPr lang="ko-KR" altLang="en-US" smtClean="0"/>
-              <a:t>2025-09-19</a:t>
+              <a:t>2026-02-10</a:t>
             </a:fld>
             <a:endParaRPr lang="ko-KR" altLang="en-US"/>
           </a:p>
@@ -12493,7 +12659,7 @@
           <a:p>
             <a:fld id="{0F78D9C4-20C1-4B15-A116-16DC77AD9A1E}" type="datetime1">
               <a:rPr lang="ko-KR" altLang="en-US" smtClean="0"/>
-              <a:t>2025-09-19</a:t>
+              <a:t>2026-02-10</a:t>
             </a:fld>
             <a:endParaRPr lang="ko-KR" altLang="en-US"/>
           </a:p>
@@ -12712,7 +12878,7 @@
           <a:p>
             <a:fld id="{0F78D9C4-20C1-4B15-A116-16DC77AD9A1E}" type="datetime1">
               <a:rPr lang="ko-KR" altLang="en-US" smtClean="0"/>
-              <a:t>2025-09-19</a:t>
+              <a:t>2026-02-10</a:t>
             </a:fld>
             <a:endParaRPr lang="ko-KR" altLang="en-US"/>
           </a:p>
@@ -13245,7 +13411,7 @@
           <a:p>
             <a:fld id="{0F78D9C4-20C1-4B15-A116-16DC77AD9A1E}" type="datetime1">
               <a:rPr lang="ko-KR" altLang="en-US" smtClean="0"/>
-              <a:t>2025-09-19</a:t>
+              <a:t>2026-02-10</a:t>
             </a:fld>
             <a:endParaRPr lang="ko-KR" altLang="en-US"/>
           </a:p>
@@ -13828,7 +13994,7 @@
           <a:p>
             <a:fld id="{0F78D9C4-20C1-4B15-A116-16DC77AD9A1E}" type="datetime1">
               <a:rPr lang="ko-KR" altLang="en-US" smtClean="0"/>
-              <a:t>2025-09-19</a:t>
+              <a:t>2026-02-10</a:t>
             </a:fld>
             <a:endParaRPr lang="ko-KR" altLang="en-US"/>
           </a:p>
@@ -14126,7 +14292,7 @@
           <a:p>
             <a:fld id="{0F78D9C4-20C1-4B15-A116-16DC77AD9A1E}" type="datetime1">
               <a:rPr lang="ko-KR" altLang="en-US" smtClean="0"/>
-              <a:t>2025-09-19</a:t>
+              <a:t>2026-02-10</a:t>
             </a:fld>
             <a:endParaRPr lang="ko-KR" altLang="en-US"/>
           </a:p>
@@ -15072,7 +15238,7 @@
           <a:p>
             <a:fld id="{0F78D9C4-20C1-4B15-A116-16DC77AD9A1E}" type="datetime1">
               <a:rPr lang="ko-KR" altLang="en-US" smtClean="0"/>
-              <a:t>2025-09-19</a:t>
+              <a:t>2026-02-10</a:t>
             </a:fld>
             <a:endParaRPr lang="ko-KR" altLang="en-US"/>
           </a:p>
@@ -15198,7 +15364,7 @@
           <a:p>
             <a:fld id="{0F78D9C4-20C1-4B15-A116-16DC77AD9A1E}" type="datetime1">
               <a:rPr lang="ko-KR" altLang="en-US" smtClean="0"/>
-              <a:t>2025-09-19</a:t>
+              <a:t>2026-02-10</a:t>
             </a:fld>
             <a:endParaRPr lang="ko-KR" altLang="en-US"/>
           </a:p>
@@ -15473,7 +15639,25 @@
                       <a:rPr lang="en-US" altLang="ko-KR" sz="2400" i="1" dirty="0" smtClean="0">
                         <a:latin typeface="Cambria Math" panose="02040503050406030204" pitchFamily="18" charset="0"/>
                       </a:rPr>
-                      <m:t> ∗ 1 = −4</m:t>
+                      <m:t> ∗ </m:t>
+                    </m:r>
+                    <m:r>
+                      <a:rPr lang="en-US" altLang="ko-KR" sz="2400" i="1" dirty="0" smtClean="0">
+                        <a:latin typeface="Cambria Math" panose="02040503050406030204" pitchFamily="18" charset="0"/>
+                      </a:rPr>
+                      <m:t>1</m:t>
+                    </m:r>
+                    <m:r>
+                      <a:rPr lang="en-US" altLang="ko-KR" sz="2400" i="1" dirty="0" smtClean="0">
+                        <a:latin typeface="Cambria Math" panose="02040503050406030204" pitchFamily="18" charset="0"/>
+                      </a:rPr>
+                      <m:t> = −</m:t>
+                    </m:r>
+                    <m:r>
+                      <a:rPr lang="en-US" altLang="ko-KR" sz="2400" i="1" dirty="0" smtClean="0">
+                        <a:latin typeface="Cambria Math" panose="02040503050406030204" pitchFamily="18" charset="0"/>
+                      </a:rPr>
+                      <m:t>4</m:t>
                     </m:r>
                   </m:oMath>
                 </a14:m>
@@ -15666,7 +15850,31 @@
                       <a:rPr lang="en-US" altLang="ko-KR" sz="2400" i="1" dirty="0" smtClean="0">
                         <a:latin typeface="Cambria Math" panose="02040503050406030204" pitchFamily="18" charset="0"/>
                       </a:rPr>
-                      <m:t> ∗ 1 = −4  </m:t>
+                      <m:t> ∗ </m:t>
+                    </m:r>
+                    <m:r>
+                      <a:rPr lang="en-US" altLang="ko-KR" sz="2400" i="1" dirty="0" smtClean="0">
+                        <a:latin typeface="Cambria Math" panose="02040503050406030204" pitchFamily="18" charset="0"/>
+                      </a:rPr>
+                      <m:t>1</m:t>
+                    </m:r>
+                    <m:r>
+                      <a:rPr lang="en-US" altLang="ko-KR" sz="2400" i="1" dirty="0" smtClean="0">
+                        <a:latin typeface="Cambria Math" panose="02040503050406030204" pitchFamily="18" charset="0"/>
+                      </a:rPr>
+                      <m:t> = −</m:t>
+                    </m:r>
+                    <m:r>
+                      <a:rPr lang="en-US" altLang="ko-KR" sz="2400" i="1" dirty="0" smtClean="0">
+                        <a:latin typeface="Cambria Math" panose="02040503050406030204" pitchFamily="18" charset="0"/>
+                      </a:rPr>
+                      <m:t>4</m:t>
+                    </m:r>
+                    <m:r>
+                      <a:rPr lang="en-US" altLang="ko-KR" sz="2400" i="1" dirty="0" smtClean="0">
+                        <a:latin typeface="Cambria Math" panose="02040503050406030204" pitchFamily="18" charset="0"/>
+                      </a:rPr>
+                      <m:t>  </m:t>
                     </m:r>
                   </m:oMath>
                 </a14:m>
@@ -15767,7 +15975,13 @@
                       <a:rPr lang="en-US" altLang="ko-KR" sz="2400" i="1" dirty="0" smtClean="0">
                         <a:latin typeface="Cambria Math" panose="02040503050406030204" pitchFamily="18" charset="0"/>
                       </a:rPr>
-                      <m:t>= −4</m:t>
+                      <m:t>= −</m:t>
+                    </m:r>
+                    <m:r>
+                      <a:rPr lang="en-US" altLang="ko-KR" sz="2400" i="1" dirty="0" smtClean="0">
+                        <a:latin typeface="Cambria Math" panose="02040503050406030204" pitchFamily="18" charset="0"/>
+                      </a:rPr>
+                      <m:t>4</m:t>
                     </m:r>
                   </m:oMath>
                 </a14:m>
@@ -15834,7 +16048,13 @@
                       <a:rPr lang="en-US" altLang="ko-KR" sz="2400" i="1" dirty="0" smtClean="0">
                         <a:latin typeface="Cambria Math" panose="02040503050406030204" pitchFamily="18" charset="0"/>
                       </a:rPr>
-                      <m:t>= −4</m:t>
+                      <m:t>= −</m:t>
+                    </m:r>
+                    <m:r>
+                      <a:rPr lang="en-US" altLang="ko-KR" sz="2400" i="1" dirty="0" smtClean="0">
+                        <a:latin typeface="Cambria Math" panose="02040503050406030204" pitchFamily="18" charset="0"/>
+                      </a:rPr>
+                      <m:t>4</m:t>
                     </m:r>
                   </m:oMath>
                 </a14:m>
@@ -15889,7 +16109,13 @@
                       <a:rPr lang="en-US" altLang="ko-KR" sz="2400" b="0" i="1" dirty="0" smtClean="0">
                         <a:latin typeface="Cambria Math" panose="02040503050406030204" pitchFamily="18" charset="0"/>
                       </a:rPr>
-                      <m:t>=−4</m:t>
+                      <m:t>=−</m:t>
+                    </m:r>
+                    <m:r>
+                      <a:rPr lang="en-US" altLang="ko-KR" sz="2400" b="0" i="1" dirty="0" smtClean="0">
+                        <a:latin typeface="Cambria Math" panose="02040503050406030204" pitchFamily="18" charset="0"/>
+                      </a:rPr>
+                      <m:t>4</m:t>
                     </m:r>
                   </m:oMath>
                 </a14:m>
